--- a/morning-registration-activities/two-minute-interview/downloads/Two_Minute_Interview.pptx
+++ b/morning-registration-activities/two-minute-interview/downloads/Two_Minute_Interview.pptx
@@ -921,9 +921,9 @@
                 <a:solidFill>
                   <a:srgbClr val="9E6169"/>
                 </a:solidFill>
-                <a:latin typeface="Karla" pitchFamily="34" charset="0"/>
-                <a:ea typeface="Karla" pitchFamily="34" charset="-122"/>
-                <a:cs typeface="Karla" pitchFamily="34" charset="-120"/>
+                <a:latin typeface="Calibri" pitchFamily="34" charset="0"/>
+                <a:ea typeface="Calibri" pitchFamily="34" charset="-122"/>
+                <a:cs typeface="Calibri" pitchFamily="34" charset="-120"/>
               </a:rPr>
               <a:t>MORNING REGISTRATION ACTIVITIES</a:t>
             </a:r>
@@ -956,13 +956,13 @@
               <a:buNone/>
             </a:pPr>
             <a:r>
-              <a:rPr lang="en-US" sz="4000" b="1" dirty="0">
+              <a:rPr lang="en-US" sz="4000" b="0" dirty="0">
                 <a:solidFill>
                   <a:srgbClr val="5C2E36"/>
                 </a:solidFill>
-                <a:latin typeface="Libre Caslon Display" pitchFamily="34" charset="0"/>
-                <a:ea typeface="Libre Caslon Display" pitchFamily="34" charset="-122"/>
-                <a:cs typeface="Libre Caslon Display" pitchFamily="34" charset="-120"/>
+                <a:latin typeface="Georgia" pitchFamily="34" charset="0"/>
+                <a:ea typeface="Georgia" pitchFamily="34" charset="-122"/>
+                <a:cs typeface="Georgia" pitchFamily="34" charset="-120"/>
               </a:rPr>
               <a:t>The Two-Minute Interview</a:t>
             </a:r>
@@ -999,9 +999,9 @@
                 <a:solidFill>
                   <a:srgbClr val="7A4A52"/>
                 </a:solidFill>
-                <a:latin typeface="Karla" pitchFamily="34" charset="0"/>
-                <a:ea typeface="Karla" pitchFamily="34" charset="-122"/>
-                <a:cs typeface="Karla" pitchFamily="34" charset="-120"/>
+                <a:latin typeface="Calibri" pitchFamily="34" charset="0"/>
+                <a:ea typeface="Calibri" pitchFamily="34" charset="-122"/>
+                <a:cs typeface="Calibri" pitchFamily="34" charset="-120"/>
               </a:rPr>
               <a:t>Pair up. Ask one question. Really listen for a minute. Then swap.</a:t>
             </a:r>
@@ -1042,6 +1042,10 @@
             </a:outerShdw>
           </a:effectLst>
         </p:spPr>
+        <p:txBody>
+          <a:bodyPr/>
+          <a:p/>
+        </p:txBody>
       </p:sp>
       <p:pic>
         <p:nvPicPr>
@@ -1091,6 +1095,10 @@
             <a:prstDash val="solid"/>
           </a:ln>
         </p:spPr>
+        <p:txBody>
+          <a:bodyPr/>
+          <a:p/>
+        </p:txBody>
       </p:sp>
       <p:sp>
         <p:nvSpPr>
@@ -1121,9 +1129,9 @@
                 <a:solidFill>
                   <a:srgbClr val="FFFDF7"/>
                 </a:solidFill>
-                <a:latin typeface="Karla" pitchFamily="34" charset="0"/>
-                <a:ea typeface="Karla" pitchFamily="34" charset="-122"/>
-                <a:cs typeface="Karla" pitchFamily="34" charset="-120"/>
+                <a:latin typeface="Calibri" pitchFamily="34" charset="0"/>
+                <a:ea typeface="Calibri" pitchFamily="34" charset="-122"/>
+                <a:cs typeface="Calibri" pitchFamily="34" charset="-120"/>
               </a:rPr>
               <a:t>1</a:t>
             </a:r>
@@ -1160,9 +1168,9 @@
                 <a:solidFill>
                   <a:srgbClr val="5C2E36"/>
                 </a:solidFill>
-                <a:latin typeface="Karla" pitchFamily="34" charset="0"/>
-                <a:ea typeface="Karla" pitchFamily="34" charset="-122"/>
-                <a:cs typeface="Karla" pitchFamily="34" charset="-120"/>
+                <a:latin typeface="Calibri" pitchFamily="34" charset="0"/>
+                <a:ea typeface="Calibri" pitchFamily="34" charset="-122"/>
+                <a:cs typeface="Calibri" pitchFamily="34" charset="-120"/>
               </a:rPr>
               <a:t>Pick a partner</a:t>
             </a:r>
@@ -1202,9 +1210,9 @@
                 <a:solidFill>
                   <a:srgbClr val="7A4A52"/>
                 </a:solidFill>
-                <a:latin typeface="Karla" pitchFamily="34" charset="0"/>
-                <a:ea typeface="Karla" pitchFamily="34" charset="-122"/>
-                <a:cs typeface="Karla" pitchFamily="34" charset="-120"/>
+                <a:latin typeface="Calibri" pitchFamily="34" charset="0"/>
+                <a:ea typeface="Calibri" pitchFamily="34" charset="-122"/>
+                <a:cs typeface="Calibri" pitchFamily="34" charset="-120"/>
               </a:rPr>
               <a:t>Anyone nearby. No need to plan pairs ahead of time.</a:t>
             </a:r>
@@ -1245,6 +1253,10 @@
             </a:outerShdw>
           </a:effectLst>
         </p:spPr>
+        <p:txBody>
+          <a:bodyPr/>
+          <a:p/>
+        </p:txBody>
       </p:sp>
       <p:pic>
         <p:nvPicPr>
@@ -1294,6 +1306,10 @@
             <a:prstDash val="solid"/>
           </a:ln>
         </p:spPr>
+        <p:txBody>
+          <a:bodyPr/>
+          <a:p/>
+        </p:txBody>
       </p:sp>
       <p:sp>
         <p:nvSpPr>
@@ -1324,9 +1340,9 @@
                 <a:solidFill>
                   <a:srgbClr val="FFFDF7"/>
                 </a:solidFill>
-                <a:latin typeface="Karla" pitchFamily="34" charset="0"/>
-                <a:ea typeface="Karla" pitchFamily="34" charset="-122"/>
-                <a:cs typeface="Karla" pitchFamily="34" charset="-120"/>
+                <a:latin typeface="Calibri" pitchFamily="34" charset="0"/>
+                <a:ea typeface="Calibri" pitchFamily="34" charset="-122"/>
+                <a:cs typeface="Calibri" pitchFamily="34" charset="-120"/>
               </a:rPr>
               <a:t>2</a:t>
             </a:r>
@@ -1363,9 +1379,9 @@
                 <a:solidFill>
                   <a:srgbClr val="5C2E36"/>
                 </a:solidFill>
-                <a:latin typeface="Karla" pitchFamily="34" charset="0"/>
-                <a:ea typeface="Karla" pitchFamily="34" charset="-122"/>
-                <a:cs typeface="Karla" pitchFamily="34" charset="-120"/>
+                <a:latin typeface="Calibri" pitchFamily="34" charset="0"/>
+                <a:ea typeface="Calibri" pitchFamily="34" charset="-122"/>
+                <a:cs typeface="Calibri" pitchFamily="34" charset="-120"/>
               </a:rPr>
               <a:t>Ask, then listen</a:t>
             </a:r>
@@ -1405,9 +1421,9 @@
                 <a:solidFill>
                   <a:srgbClr val="7A4A52"/>
                 </a:solidFill>
-                <a:latin typeface="Karla" pitchFamily="34" charset="0"/>
-                <a:ea typeface="Karla" pitchFamily="34" charset="-122"/>
-                <a:cs typeface="Karla" pitchFamily="34" charset="-120"/>
+                <a:latin typeface="Calibri" pitchFamily="34" charset="0"/>
+                <a:ea typeface="Calibri" pitchFamily="34" charset="-122"/>
+                <a:cs typeface="Calibri" pitchFamily="34" charset="-120"/>
               </a:rPr>
               <a:t>Pick a card from the set. One question, one full minute of listening.</a:t>
             </a:r>
@@ -1448,6 +1464,10 @@
             </a:outerShdw>
           </a:effectLst>
         </p:spPr>
+        <p:txBody>
+          <a:bodyPr/>
+          <a:p/>
+        </p:txBody>
       </p:sp>
       <p:pic>
         <p:nvPicPr>
@@ -1497,6 +1517,10 @@
             <a:prstDash val="solid"/>
           </a:ln>
         </p:spPr>
+        <p:txBody>
+          <a:bodyPr/>
+          <a:p/>
+        </p:txBody>
       </p:sp>
       <p:sp>
         <p:nvSpPr>
@@ -1527,9 +1551,9 @@
                 <a:solidFill>
                   <a:srgbClr val="FFFDF7"/>
                 </a:solidFill>
-                <a:latin typeface="Karla" pitchFamily="34" charset="0"/>
-                <a:ea typeface="Karla" pitchFamily="34" charset="-122"/>
-                <a:cs typeface="Karla" pitchFamily="34" charset="-120"/>
+                <a:latin typeface="Calibri" pitchFamily="34" charset="0"/>
+                <a:ea typeface="Calibri" pitchFamily="34" charset="-122"/>
+                <a:cs typeface="Calibri" pitchFamily="34" charset="-120"/>
               </a:rPr>
               <a:t>3</a:t>
             </a:r>
@@ -1566,9 +1590,9 @@
                 <a:solidFill>
                   <a:srgbClr val="5C2E36"/>
                 </a:solidFill>
-                <a:latin typeface="Karla" pitchFamily="34" charset="0"/>
-                <a:ea typeface="Karla" pitchFamily="34" charset="-122"/>
-                <a:cs typeface="Karla" pitchFamily="34" charset="-120"/>
+                <a:latin typeface="Calibri" pitchFamily="34" charset="0"/>
+                <a:ea typeface="Calibri" pitchFamily="34" charset="-122"/>
+                <a:cs typeface="Calibri" pitchFamily="34" charset="-120"/>
               </a:rPr>
               <a:t>Swap</a:t>
             </a:r>
@@ -1608,9 +1632,9 @@
                 <a:solidFill>
                   <a:srgbClr val="7A4A52"/>
                 </a:solidFill>
-                <a:latin typeface="Karla" pitchFamily="34" charset="0"/>
-                <a:ea typeface="Karla" pitchFamily="34" charset="-122"/>
-                <a:cs typeface="Karla" pitchFamily="34" charset="-120"/>
+                <a:latin typeface="Calibri" pitchFamily="34" charset="0"/>
+                <a:ea typeface="Calibri" pitchFamily="34" charset="-122"/>
+                <a:cs typeface="Calibri" pitchFamily="34" charset="-120"/>
               </a:rPr>
               <a:t>Your partner asks you the same question back.</a:t>
             </a:r>
@@ -1639,6 +1663,10 @@
           </a:solidFill>
           <a:ln/>
         </p:spPr>
+        <p:txBody>
+          <a:bodyPr/>
+          <a:p/>
+        </p:txBody>
       </p:sp>
       <p:sp>
         <p:nvSpPr>
@@ -1672,9 +1700,9 @@
                 <a:solidFill>
                   <a:srgbClr val="FFFDF7"/>
                 </a:solidFill>
-                <a:latin typeface="Libre Caslon Display" pitchFamily="34" charset="0"/>
-                <a:ea typeface="Libre Caslon Display" pitchFamily="34" charset="-122"/>
-                <a:cs typeface="Libre Caslon Display" pitchFamily="34" charset="-120"/>
+                <a:latin typeface="Georgia" pitchFamily="34" charset="0"/>
+                <a:ea typeface="Georgia" pitchFamily="34" charset="-122"/>
+                <a:cs typeface="Georgia" pitchFamily="34" charset="-120"/>
               </a:rPr>
               <a:t>“What’s something you’ve got better at this year?”</a:t>
             </a:r>
@@ -1711,9 +1739,9 @@
                 <a:solidFill>
                   <a:srgbClr val="DFC3C7"/>
                 </a:solidFill>
-                <a:latin typeface="Karla" pitchFamily="34" charset="0"/>
-                <a:ea typeface="Karla" pitchFamily="34" charset="-122"/>
-                <a:cs typeface="Karla" pitchFamily="34" charset="-120"/>
+                <a:latin typeface="Calibri" pitchFamily="34" charset="0"/>
+                <a:ea typeface="Calibri" pitchFamily="34" charset="-122"/>
+                <a:cs typeface="Calibri" pitchFamily="34" charset="-120"/>
               </a:rPr>
               <a:t>One of twelve cards in the resource pack</a:t>
             </a:r>
@@ -1750,9 +1778,9 @@
                 <a:solidFill>
                   <a:srgbClr val="A98088"/>
                 </a:solidFill>
-                <a:latin typeface="Karla" pitchFamily="34" charset="0"/>
-                <a:ea typeface="Karla" pitchFamily="34" charset="-122"/>
-                <a:cs typeface="Karla" pitchFamily="34" charset="-120"/>
+                <a:latin typeface="Calibri" pitchFamily="34" charset="0"/>
+                <a:ea typeface="Calibri" pitchFamily="34" charset="-122"/>
+                <a:cs typeface="Calibri" pitchFamily="34" charset="-120"/>
               </a:rPr>
               <a:t>Needs: the printed cards (cut out once, reuse all year). Nothing else to prepare.</a:t>
             </a:r>
@@ -1813,9 +1841,9 @@
                 <a:solidFill>
                   <a:srgbClr val="A98088"/>
                 </a:solidFill>
-                <a:latin typeface="Libre Caslon Display" pitchFamily="34" charset="0"/>
-                <a:ea typeface="Libre Caslon Display" pitchFamily="34" charset="-122"/>
-                <a:cs typeface="Libre Caslon Display" pitchFamily="34" charset="-120"/>
+                <a:latin typeface="Georgia" pitchFamily="34" charset="0"/>
+                <a:ea typeface="Georgia" pitchFamily="34" charset="-122"/>
+                <a:cs typeface="Georgia" pitchFamily="34" charset="-120"/>
               </a:rPr>
               <a:t>The Pastoral Guide</a:t>
             </a:r>
